--- a/Paper/报告/5_ZoneKV .pptx
+++ b/Paper/报告/5_ZoneKV .pptx
@@ -234,7 +234,7 @@
           <a:p>
             <a:fld id="{8DBAFB0F-6192-48FE-99AC-AF225DC028A7}" type="datetimeFigureOut">
               <a:rPr lang="zh-CN" altLang="en-US" smtClean="0"/>
-              <a:t>2024/3/27</a:t>
+              <a:t>2024/4/7</a:t>
             </a:fld>
             <a:endParaRPr lang="zh-CN" altLang="en-US"/>
           </a:p>
@@ -2480,7 +2480,7 @@
           <a:p>
             <a:fld id="{B3A1CB8A-CC46-473E-BAED-B264D45A45B1}" type="datetimeFigureOut">
               <a:rPr lang="zh-CN" altLang="en-US" smtClean="0"/>
-              <a:t>2024/3/27</a:t>
+              <a:t>2024/4/7</a:t>
             </a:fld>
             <a:endParaRPr lang="zh-CN" altLang="en-US"/>
           </a:p>
@@ -2651,7 +2651,7 @@
           <a:p>
             <a:fld id="{B3A1CB8A-CC46-473E-BAED-B264D45A45B1}" type="datetimeFigureOut">
               <a:rPr lang="zh-CN" altLang="en-US" smtClean="0"/>
-              <a:t>2024/3/27</a:t>
+              <a:t>2024/4/7</a:t>
             </a:fld>
             <a:endParaRPr lang="zh-CN" altLang="en-US"/>
           </a:p>
@@ -2832,7 +2832,7 @@
           <a:p>
             <a:fld id="{B3A1CB8A-CC46-473E-BAED-B264D45A45B1}" type="datetimeFigureOut">
               <a:rPr lang="zh-CN" altLang="en-US" smtClean="0"/>
-              <a:t>2024/3/27</a:t>
+              <a:t>2024/4/7</a:t>
             </a:fld>
             <a:endParaRPr lang="zh-CN" altLang="en-US"/>
           </a:p>
@@ -3003,7 +3003,7 @@
           <a:p>
             <a:fld id="{B3A1CB8A-CC46-473E-BAED-B264D45A45B1}" type="datetimeFigureOut">
               <a:rPr lang="zh-CN" altLang="en-US" smtClean="0"/>
-              <a:t>2024/3/27</a:t>
+              <a:t>2024/4/7</a:t>
             </a:fld>
             <a:endParaRPr lang="zh-CN" altLang="en-US"/>
           </a:p>
@@ -3251,7 +3251,7 @@
           <a:p>
             <a:fld id="{B3A1CB8A-CC46-473E-BAED-B264D45A45B1}" type="datetimeFigureOut">
               <a:rPr lang="zh-CN" altLang="en-US" smtClean="0"/>
-              <a:t>2024/3/27</a:t>
+              <a:t>2024/4/7</a:t>
             </a:fld>
             <a:endParaRPr lang="zh-CN" altLang="en-US"/>
           </a:p>
@@ -3483,7 +3483,7 @@
           <a:p>
             <a:fld id="{B3A1CB8A-CC46-473E-BAED-B264D45A45B1}" type="datetimeFigureOut">
               <a:rPr lang="zh-CN" altLang="en-US" smtClean="0"/>
-              <a:t>2024/3/27</a:t>
+              <a:t>2024/4/7</a:t>
             </a:fld>
             <a:endParaRPr lang="zh-CN" altLang="en-US"/>
           </a:p>
@@ -3850,7 +3850,7 @@
           <a:p>
             <a:fld id="{B3A1CB8A-CC46-473E-BAED-B264D45A45B1}" type="datetimeFigureOut">
               <a:rPr lang="zh-CN" altLang="en-US" smtClean="0"/>
-              <a:t>2024/3/27</a:t>
+              <a:t>2024/4/7</a:t>
             </a:fld>
             <a:endParaRPr lang="zh-CN" altLang="en-US"/>
           </a:p>
@@ -3970,7 +3970,7 @@
           <a:p>
             <a:fld id="{B3A1CB8A-CC46-473E-BAED-B264D45A45B1}" type="datetimeFigureOut">
               <a:rPr lang="zh-CN" altLang="en-US" smtClean="0"/>
-              <a:t>2024/3/27</a:t>
+              <a:t>2024/4/7</a:t>
             </a:fld>
             <a:endParaRPr lang="zh-CN" altLang="en-US"/>
           </a:p>
@@ -4068,7 +4068,7 @@
           <a:p>
             <a:fld id="{B3A1CB8A-CC46-473E-BAED-B264D45A45B1}" type="datetimeFigureOut">
               <a:rPr lang="zh-CN" altLang="en-US" smtClean="0"/>
-              <a:t>2024/3/27</a:t>
+              <a:t>2024/4/7</a:t>
             </a:fld>
             <a:endParaRPr lang="zh-CN" altLang="en-US"/>
           </a:p>
@@ -4346,7 +4346,7 @@
           <a:p>
             <a:fld id="{B3A1CB8A-CC46-473E-BAED-B264D45A45B1}" type="datetimeFigureOut">
               <a:rPr lang="zh-CN" altLang="en-US" smtClean="0"/>
-              <a:t>2024/3/27</a:t>
+              <a:t>2024/4/7</a:t>
             </a:fld>
             <a:endParaRPr lang="zh-CN" altLang="en-US"/>
           </a:p>
@@ -4601,7 +4601,7 @@
           <a:p>
             <a:fld id="{B3A1CB8A-CC46-473E-BAED-B264D45A45B1}" type="datetimeFigureOut">
               <a:rPr lang="zh-CN" altLang="en-US" smtClean="0"/>
-              <a:t>2024/3/27</a:t>
+              <a:t>2024/4/7</a:t>
             </a:fld>
             <a:endParaRPr lang="zh-CN" altLang="en-US"/>
           </a:p>
@@ -4815,7 +4815,7 @@
           <a:p>
             <a:fld id="{B3A1CB8A-CC46-473E-BAED-B264D45A45B1}" type="datetimeFigureOut">
               <a:rPr lang="zh-CN" altLang="en-US" smtClean="0"/>
-              <a:t>2024/3/27</a:t>
+              <a:t>2024/4/7</a:t>
             </a:fld>
             <a:endParaRPr lang="zh-CN" altLang="en-US"/>
           </a:p>
@@ -5491,7 +5491,7 @@
                 <a:latin typeface="Constantia" panose="02030602050306030303" pitchFamily="18" charset="0"/>
                 <a:cs typeface="Times" panose="02020603050405020304" pitchFamily="18" charset="0"/>
               </a:rPr>
-              <a:t>March 27, 2024</a:t>
+              <a:t>April 7, 2024</a:t>
             </a:fld>
             <a:endParaRPr lang="zh-CN" altLang="en-US" sz="1400" b="1" dirty="0">
               <a:solidFill>
@@ -6217,7 +6217,7 @@
                 <a:latin typeface="Constantia" panose="02030602050306030303" pitchFamily="18" charset="0"/>
                 <a:cs typeface="Times" panose="02020603050405020304" pitchFamily="18" charset="0"/>
               </a:rPr>
-              <a:t>March 27, 2024</a:t>
+              <a:t>April 7, 2024</a:t>
             </a:fld>
             <a:endParaRPr lang="zh-CN" altLang="en-US" sz="1400" b="1" dirty="0">
               <a:solidFill>
@@ -6935,7 +6935,7 @@
                 <a:latin typeface="Constantia" panose="02030602050306030303" pitchFamily="18" charset="0"/>
                 <a:cs typeface="Times" panose="02020603050405020304" pitchFamily="18" charset="0"/>
               </a:rPr>
-              <a:t>March 27, 2024</a:t>
+              <a:t>April 7, 2024</a:t>
             </a:fld>
             <a:endParaRPr lang="zh-CN" altLang="en-US" sz="1400" b="1" dirty="0">
               <a:solidFill>
@@ -8254,7 +8254,7 @@
                 <a:latin typeface="Constantia" panose="02030602050306030303" pitchFamily="18" charset="0"/>
                 <a:cs typeface="Times" panose="02020603050405020304" pitchFamily="18" charset="0"/>
               </a:rPr>
-              <a:t>March 27, 2024</a:t>
+              <a:t>April 7, 2024</a:t>
             </a:fld>
             <a:endParaRPr lang="zh-CN" altLang="en-US" sz="1400" b="1" dirty="0">
               <a:solidFill>
@@ -9159,7 +9159,7 @@
                 <a:latin typeface="Constantia" panose="02030602050306030303" pitchFamily="18" charset="0"/>
                 <a:cs typeface="Times" panose="02020603050405020304" pitchFamily="18" charset="0"/>
               </a:rPr>
-              <a:t>March 27, 2024</a:t>
+              <a:t>April 7, 2024</a:t>
             </a:fld>
             <a:endParaRPr lang="zh-CN" altLang="en-US" sz="1400" b="1" dirty="0">
               <a:solidFill>
@@ -10422,7 +10422,7 @@
                 <a:latin typeface="Constantia" panose="02030602050306030303" pitchFamily="18" charset="0"/>
                 <a:cs typeface="Times" panose="02020603050405020304" pitchFamily="18" charset="0"/>
               </a:rPr>
-              <a:t>March 27, 2024</a:t>
+              <a:t>April 7, 2024</a:t>
             </a:fld>
             <a:endParaRPr lang="zh-CN" altLang="en-US" sz="1400" b="1" dirty="0">
               <a:solidFill>
@@ -11561,7 +11561,7 @@
                 <a:latin typeface="Constantia" panose="02030602050306030303" pitchFamily="18" charset="0"/>
                 <a:cs typeface="Times" panose="02020603050405020304" pitchFamily="18" charset="0"/>
               </a:rPr>
-              <a:t>March 27, 2024</a:t>
+              <a:t>April 7, 2024</a:t>
             </a:fld>
             <a:endParaRPr lang="zh-CN" altLang="en-US" sz="1400" b="1" dirty="0">
               <a:solidFill>
@@ -12508,7 +12508,7 @@
                 <a:latin typeface="Constantia" panose="02030602050306030303" pitchFamily="18" charset="0"/>
                 <a:cs typeface="Times" panose="02020603050405020304" pitchFamily="18" charset="0"/>
               </a:rPr>
-              <a:t>March 27, 2024</a:t>
+              <a:t>April 7, 2024</a:t>
             </a:fld>
             <a:endParaRPr lang="zh-CN" altLang="en-US" sz="1400" b="1" dirty="0">
               <a:solidFill>
@@ -13739,7 +13739,7 @@
                 <a:latin typeface="Constantia" panose="02030602050306030303" pitchFamily="18" charset="0"/>
                 <a:cs typeface="Times" panose="02020603050405020304" pitchFamily="18" charset="0"/>
               </a:rPr>
-              <a:t>March 27, 2024</a:t>
+              <a:t>April 7, 2024</a:t>
             </a:fld>
             <a:endParaRPr lang="zh-CN" altLang="en-US" sz="1400" b="1" dirty="0">
               <a:solidFill>
@@ -14624,7 +14624,7 @@
                 <a:latin typeface="Constantia" panose="02030602050306030303" pitchFamily="18" charset="0"/>
                 <a:cs typeface="Times" panose="02020603050405020304" pitchFamily="18" charset="0"/>
               </a:rPr>
-              <a:t>March 27, 2024</a:t>
+              <a:t>April 7, 2024</a:t>
             </a:fld>
             <a:endParaRPr lang="zh-CN" altLang="en-US" sz="1400" b="1" dirty="0">
               <a:solidFill>
@@ -15351,7 +15351,7 @@
                 <a:latin typeface="Constantia" panose="02030602050306030303" pitchFamily="18" charset="0"/>
                 <a:cs typeface="Times" panose="02020603050405020304" pitchFamily="18" charset="0"/>
               </a:rPr>
-              <a:t>March 27, 2024</a:t>
+              <a:t>April 7, 2024</a:t>
             </a:fld>
             <a:endParaRPr lang="zh-CN" altLang="en-US" sz="1400" b="1" dirty="0">
               <a:solidFill>
